--- a/reference_content/Slides/TORCH_nlp.pptx
+++ b/reference_content/Slides/TORCH_nlp.pptx
@@ -17,19 +17,20 @@
     <p:sldId id="281" r:id="rId11"/>
     <p:sldId id="265" r:id="rId12"/>
     <p:sldId id="260" r:id="rId13"/>
-    <p:sldId id="261" r:id="rId14"/>
-    <p:sldId id="269" r:id="rId15"/>
-    <p:sldId id="270" r:id="rId16"/>
-    <p:sldId id="262" r:id="rId17"/>
-    <p:sldId id="273" r:id="rId18"/>
-    <p:sldId id="271" r:id="rId19"/>
-    <p:sldId id="277" r:id="rId20"/>
-    <p:sldId id="266" r:id="rId21"/>
-    <p:sldId id="274" r:id="rId22"/>
-    <p:sldId id="275" r:id="rId23"/>
-    <p:sldId id="276" r:id="rId24"/>
-    <p:sldId id="267" r:id="rId25"/>
-    <p:sldId id="268" r:id="rId26"/>
+    <p:sldId id="283" r:id="rId14"/>
+    <p:sldId id="261" r:id="rId15"/>
+    <p:sldId id="269" r:id="rId16"/>
+    <p:sldId id="270" r:id="rId17"/>
+    <p:sldId id="262" r:id="rId18"/>
+    <p:sldId id="273" r:id="rId19"/>
+    <p:sldId id="271" r:id="rId20"/>
+    <p:sldId id="277" r:id="rId21"/>
+    <p:sldId id="266" r:id="rId22"/>
+    <p:sldId id="274" r:id="rId23"/>
+    <p:sldId id="275" r:id="rId24"/>
+    <p:sldId id="276" r:id="rId25"/>
+    <p:sldId id="267" r:id="rId26"/>
+    <p:sldId id="268" r:id="rId27"/>
   </p:sldIdLst>
   <p:sldSz cx="12192000" cy="6858000"/>
   <p:notesSz cx="6858000" cy="9144000"/>
@@ -161,6 +162,7 @@
         <p14:section name="Padding" id="{ED6B34E2-AB8D-A745-B450-4FBD0082BC25}">
           <p14:sldIdLst>
             <p14:sldId id="260"/>
+            <p14:sldId id="283"/>
           </p14:sldIdLst>
         </p14:section>
         <p14:section name="Sequences" id="{10F186FD-5291-BF49-9AB0-9D440E162FC8}">
@@ -3773,7 +3775,12 @@
             <p:ph idx="1"/>
           </p:nvPr>
         </p:nvSpPr>
-        <p:spPr/>
+        <p:spPr>
+          <a:xfrm>
+            <a:off x="1451579" y="1853754"/>
+            <a:ext cx="9603275" cy="4199727"/>
+          </a:xfrm>
+        </p:spPr>
         <p:txBody>
           <a:bodyPr/>
           <a:lstStyle/>
@@ -3795,6 +3802,46 @@
             <a:r>
               <a:rPr lang="en-US" dirty="0"/>
               <a:t>Using embeddings to their fullest. </a:t>
+            </a:r>
+          </a:p>
+          <a:p>
+            <a:r>
+              <a:rPr lang="en-US" dirty="0"/>
+              <a:t>Next (and last!) project starting repository is up. </a:t>
+            </a:r>
+          </a:p>
+          <a:p>
+            <a:pPr lvl="1"/>
+            <a:r>
+              <a:rPr lang="en-US" dirty="0"/>
+              <a:t>You need to classify some images, in a few different ways. </a:t>
+            </a:r>
+          </a:p>
+          <a:p>
+            <a:pPr lvl="1"/>
+            <a:r>
+              <a:rPr lang="en-US" dirty="0"/>
+              <a:t>Make a presentation (in workbook, not literally) that demonstrates that you know how to do this and are good at it. </a:t>
+            </a:r>
+          </a:p>
+          <a:p>
+            <a:r>
+              <a:rPr lang="en-US" dirty="0"/>
+              <a:t>Next class (</a:t>
+            </a:r>
+            <a:r>
+              <a:rPr lang="en-US" dirty="0" err="1"/>
+              <a:t>lstm</a:t>
+            </a:r>
+            <a:r>
+              <a:rPr lang="en-US" dirty="0"/>
+              <a:t> text generation) will be a cutoff for the test in 1.5 weeks. </a:t>
+            </a:r>
+          </a:p>
+          <a:p>
+            <a:r>
+              <a:rPr lang="en-US" dirty="0"/>
+              <a:t>Do you all need anything specific for the project stuff?</a:t>
             </a:r>
           </a:p>
         </p:txBody>
@@ -4019,13 +4066,8 @@
             <a:pPr lvl="1"/>
             <a:r>
               <a:rPr lang="en-US" dirty="0"/>
-              <a:t>Embedding layer will translate it to vector of meaning, this will be </a:t>
-            </a:r>
-            <a:r>
-              <a:rPr lang="en-US"/>
-              <a:t>passed forward. </a:t>
-            </a:r>
-            <a:endParaRPr lang="en-US" dirty="0"/>
+              <a:t>Embedding layer will translate it to vector of meaning, this will be passed forward. </a:t>
+            </a:r>
           </a:p>
         </p:txBody>
       </p:sp>
@@ -4249,7 +4291,7 @@
           <p:cNvPr id="2" name="Title 1">
             <a:extLst>
               <a:ext uri="{FF2B5EF4-FFF2-40B4-BE49-F238E27FC236}">
-                <a16:creationId xmlns:a16="http://schemas.microsoft.com/office/drawing/2014/main" id="{6634F454-54E5-151C-AE4C-B0E67CD3F9C4}"/>
+                <a16:creationId xmlns:a16="http://schemas.microsoft.com/office/drawing/2014/main" id="{A55DDFA4-393E-5110-6900-68096A021D55}"/>
               </a:ext>
             </a:extLst>
           </p:cNvPr>
@@ -4267,7 +4309,7 @@
           <a:p>
             <a:r>
               <a:rPr lang="en-US" dirty="0"/>
-              <a:t>Sequences</a:t>
+              <a:t>Post Padding</a:t>
             </a:r>
           </a:p>
         </p:txBody>
@@ -4277,7 +4319,7 @@
           <p:cNvPr id="3" name="Content Placeholder 2">
             <a:extLst>
               <a:ext uri="{FF2B5EF4-FFF2-40B4-BE49-F238E27FC236}">
-                <a16:creationId xmlns:a16="http://schemas.microsoft.com/office/drawing/2014/main" id="{EFB1F880-630C-A801-684C-80E83D1A3C10}"/>
+                <a16:creationId xmlns:a16="http://schemas.microsoft.com/office/drawing/2014/main" id="{F97CAC3D-573A-FAD8-A247-F31CBCB99315}"/>
               </a:ext>
             </a:extLst>
           </p:cNvPr>
@@ -4290,8 +4332,8 @@
         </p:nvSpPr>
         <p:spPr>
           <a:xfrm>
-            <a:off x="1451579" y="2015732"/>
-            <a:ext cx="9603275" cy="4037749"/>
+            <a:off x="1451579" y="1853754"/>
+            <a:ext cx="9603275" cy="1308547"/>
           </a:xfrm>
         </p:spPr>
         <p:txBody>
@@ -4299,63 +4341,79 @@
           <a:lstStyle/>
           <a:p>
             <a:r>
-              <a:rPr lang="en-US" dirty="0" err="1"/>
-              <a:t>PyTorch</a:t>
-            </a:r>
-            <a:r>
-              <a:rPr lang="en-US" dirty="0"/>
-              <a:t> also offers a more elaborate way to manage different length inputs – sequences. </a:t>
-            </a:r>
-          </a:p>
-          <a:p>
-            <a:pPr lvl="1"/>
-            <a:r>
-              <a:rPr lang="en-US" dirty="0"/>
-              <a:t>Sequences can manage different lengths, without padding. </a:t>
-            </a:r>
-          </a:p>
-          <a:p>
-            <a:r>
-              <a:rPr lang="en-US" dirty="0"/>
-              <a:t>Saves processing time, we don’t need to worry about the padded part. </a:t>
-            </a:r>
-          </a:p>
-          <a:p>
-            <a:r>
-              <a:rPr lang="en-US" dirty="0" err="1"/>
-              <a:t>PyTorch</a:t>
-            </a:r>
-            <a:r>
-              <a:rPr lang="en-US" dirty="0"/>
-              <a:t> provides padded and packed sequences to:</a:t>
-            </a:r>
-          </a:p>
-          <a:p>
-            <a:pPr lvl="1"/>
-            <a:r>
-              <a:rPr lang="en-US" dirty="0"/>
-              <a:t>Keep batching efficient.</a:t>
-            </a:r>
-          </a:p>
-          <a:p>
-            <a:pPr lvl="1"/>
-            <a:r>
-              <a:rPr lang="en-US" dirty="0"/>
-              <a:t>Ensure RNN/LSTM models only process real tokens.</a:t>
-            </a:r>
-          </a:p>
-          <a:p>
-            <a:r>
-              <a:rPr lang="en-US" dirty="0"/>
-              <a:t>Common workflow: pad → pack → model. </a:t>
-            </a:r>
-          </a:p>
-        </p:txBody>
-      </p:sp>
+              <a:rPr lang="en-US" dirty="0"/>
+              <a:t>After padding, we have a usable dataset. </a:t>
+            </a:r>
+          </a:p>
+          <a:p>
+            <a:pPr lvl="1"/>
+            <a:r>
+              <a:rPr lang="en-US" dirty="0"/>
+              <a:t>Each X value will be a fixed number of tokens before the current word.</a:t>
+            </a:r>
+          </a:p>
+          <a:p>
+            <a:pPr lvl="1"/>
+            <a:r>
+              <a:rPr lang="en-US" dirty="0"/>
+              <a:t>The target is the next token, we can train. </a:t>
+            </a:r>
+          </a:p>
+          <a:p>
+            <a:pPr lvl="1"/>
+            <a:endParaRPr lang="en-US" dirty="0"/>
+          </a:p>
+        </p:txBody>
+      </p:sp>
+      <p:pic>
+        <p:nvPicPr>
+          <p:cNvPr id="4098" name="Picture 2" descr="PackedBERT: How to accelerate NLP tasks for Transformers with packing">
+            <a:extLst>
+              <a:ext uri="{FF2B5EF4-FFF2-40B4-BE49-F238E27FC236}">
+                <a16:creationId xmlns:a16="http://schemas.microsoft.com/office/drawing/2014/main" id="{D9E303AE-084E-660D-E255-9A480975C554}"/>
+              </a:ext>
+            </a:extLst>
+          </p:cNvPr>
+          <p:cNvPicPr>
+            <a:picLocks noChangeAspect="1" noChangeArrowheads="1"/>
+          </p:cNvPicPr>
+          <p:nvPr/>
+        </p:nvPicPr>
+        <p:blipFill rotWithShape="1">
+          <a:blip r:embed="rId2">
+            <a:extLst>
+              <a:ext uri="{28A0092B-C50C-407E-A947-70E740481C1C}">
+                <a14:useLocalDpi xmlns:a14="http://schemas.microsoft.com/office/drawing/2010/main" val="0"/>
+              </a:ext>
+            </a:extLst>
+          </a:blip>
+          <a:srcRect l="13125" t="23000" r="10562" b="23111"/>
+          <a:stretch/>
+        </p:blipFill>
+        <p:spPr bwMode="auto">
+          <a:xfrm>
+            <a:off x="1451579" y="3162300"/>
+            <a:ext cx="9304020" cy="3695700"/>
+          </a:xfrm>
+          <a:prstGeom prst="rect">
+            <a:avLst/>
+          </a:prstGeom>
+          <a:noFill/>
+          <a:extLst>
+            <a:ext uri="{909E8E84-426E-40DD-AFC4-6F175D3DCCD1}">
+              <a14:hiddenFill xmlns:a14="http://schemas.microsoft.com/office/drawing/2010/main">
+                <a:solidFill>
+                  <a:srgbClr val="FFFFFF"/>
+                </a:solidFill>
+              </a14:hiddenFill>
+            </a:ext>
+          </a:extLst>
+        </p:spPr>
+      </p:pic>
     </p:spTree>
     <p:extLst>
       <p:ext uri="{BB962C8B-B14F-4D97-AF65-F5344CB8AC3E}">
-        <p14:creationId xmlns:p14="http://schemas.microsoft.com/office/powerpoint/2010/main" val="3438860243"/>
+        <p14:creationId xmlns:p14="http://schemas.microsoft.com/office/powerpoint/2010/main" val="3368754457"/>
       </p:ext>
     </p:extLst>
   </p:cSld>
@@ -4387,7 +4445,7 @@
           <p:cNvPr id="2" name="Title 1">
             <a:extLst>
               <a:ext uri="{FF2B5EF4-FFF2-40B4-BE49-F238E27FC236}">
-                <a16:creationId xmlns:a16="http://schemas.microsoft.com/office/drawing/2014/main" id="{F868A926-BFE7-EB9C-F63B-3843EC513BB6}"/>
+                <a16:creationId xmlns:a16="http://schemas.microsoft.com/office/drawing/2014/main" id="{6634F454-54E5-151C-AE4C-B0E67CD3F9C4}"/>
               </a:ext>
             </a:extLst>
           </p:cNvPr>
@@ -4405,7 +4463,7 @@
           <a:p>
             <a:r>
               <a:rPr lang="en-US" dirty="0"/>
-              <a:t>Creating Sequences</a:t>
+              <a:t>Sequences</a:t>
             </a:r>
           </a:p>
         </p:txBody>
@@ -4415,7 +4473,7 @@
           <p:cNvPr id="3" name="Content Placeholder 2">
             <a:extLst>
               <a:ext uri="{FF2B5EF4-FFF2-40B4-BE49-F238E27FC236}">
-                <a16:creationId xmlns:a16="http://schemas.microsoft.com/office/drawing/2014/main" id="{E40C557B-576C-A171-136A-452E4FC2469F}"/>
+                <a16:creationId xmlns:a16="http://schemas.microsoft.com/office/drawing/2014/main" id="{EFB1F880-630C-A801-684C-80E83D1A3C10}"/>
               </a:ext>
             </a:extLst>
           </p:cNvPr>
@@ -4433,69 +4491,59 @@
           </a:xfrm>
         </p:spPr>
         <p:txBody>
-          <a:bodyPr>
-            <a:normAutofit/>
-          </a:bodyPr>
-          <a:lstStyle/>
-          <a:p>
-            <a:r>
-              <a:rPr lang="en-US" dirty="0"/>
-              <a:t>Packed sequences remove padded elements before computation</a:t>
-            </a:r>
-          </a:p>
-          <a:p>
-            <a:pPr lvl="1"/>
-            <a:r>
-              <a:rPr lang="en-US" dirty="0"/>
-              <a:t>Created using </a:t>
-            </a:r>
+          <a:bodyPr/>
+          <a:lstStyle/>
+          <a:p>
             <a:r>
               <a:rPr lang="en-US" dirty="0" err="1"/>
-              <a:t>pack_padded_sequence</a:t>
-            </a:r>
-            <a:r>
-              <a:rPr lang="en-US" dirty="0"/>
-              <a:t>()</a:t>
-            </a:r>
-          </a:p>
-          <a:p>
-            <a:r>
-              <a:rPr lang="en-US" dirty="0"/>
-              <a:t>To pack the sequences, we need:</a:t>
-            </a:r>
-          </a:p>
-          <a:p>
-            <a:pPr lvl="1"/>
-            <a:r>
-              <a:rPr lang="en-US" dirty="0"/>
-              <a:t>Actual sequence lengths.</a:t>
-            </a:r>
-          </a:p>
-          <a:p>
-            <a:pPr lvl="1"/>
-            <a:r>
-              <a:rPr lang="en-US" dirty="0"/>
-              <a:t>Sequences are sorted by length or the </a:t>
-            </a:r>
+              <a:t>PyTorch</a:t>
+            </a:r>
+            <a:r>
+              <a:rPr lang="en-US" dirty="0"/>
+              <a:t> also offers a more elaborate way to manage different length inputs – sequences. </a:t>
+            </a:r>
+          </a:p>
+          <a:p>
+            <a:pPr lvl="1"/>
+            <a:r>
+              <a:rPr lang="en-US" dirty="0"/>
+              <a:t>Sequences can manage different lengths, without padding. </a:t>
+            </a:r>
+          </a:p>
+          <a:p>
+            <a:r>
+              <a:rPr lang="en-US" dirty="0"/>
+              <a:t>Saves processing time, we don’t need to worry about the padded part. </a:t>
+            </a:r>
+          </a:p>
+          <a:p>
             <a:r>
               <a:rPr lang="en-US" dirty="0" err="1"/>
-              <a:t>enforce_sorted</a:t>
-            </a:r>
-            <a:r>
-              <a:rPr lang="en-US" dirty="0"/>
-              <a:t> is False. </a:t>
-            </a:r>
-          </a:p>
-          <a:p>
-            <a:r>
-              <a:rPr lang="en-US" dirty="0"/>
-              <a:t>Allows for model to not deal with useless padding data. </a:t>
-            </a:r>
-          </a:p>
-          <a:p>
-            <a:r>
-              <a:rPr lang="en-US" dirty="0"/>
-              <a:t>Helps convergence in many cases. </a:t>
+              <a:t>PyTorch</a:t>
+            </a:r>
+            <a:r>
+              <a:rPr lang="en-US" dirty="0"/>
+              <a:t> provides padded and packed sequences to:</a:t>
+            </a:r>
+          </a:p>
+          <a:p>
+            <a:pPr lvl="1"/>
+            <a:r>
+              <a:rPr lang="en-US" dirty="0"/>
+              <a:t>Keep batching efficient.</a:t>
+            </a:r>
+          </a:p>
+          <a:p>
+            <a:pPr lvl="1"/>
+            <a:r>
+              <a:rPr lang="en-US" dirty="0"/>
+              <a:t>Ensure RNN/LSTM models only process real tokens.</a:t>
+            </a:r>
+          </a:p>
+          <a:p>
+            <a:r>
+              <a:rPr lang="en-US" dirty="0"/>
+              <a:t>Common workflow: pad → pack → model. </a:t>
             </a:r>
           </a:p>
         </p:txBody>
@@ -4503,7 +4551,7 @@
     </p:spTree>
     <p:extLst>
       <p:ext uri="{BB962C8B-B14F-4D97-AF65-F5344CB8AC3E}">
-        <p14:creationId xmlns:p14="http://schemas.microsoft.com/office/powerpoint/2010/main" val="148726018"/>
+        <p14:creationId xmlns:p14="http://schemas.microsoft.com/office/powerpoint/2010/main" val="3438860243"/>
       </p:ext>
     </p:extLst>
   </p:cSld>
@@ -4535,7 +4583,7 @@
           <p:cNvPr id="2" name="Title 1">
             <a:extLst>
               <a:ext uri="{FF2B5EF4-FFF2-40B4-BE49-F238E27FC236}">
-                <a16:creationId xmlns:a16="http://schemas.microsoft.com/office/drawing/2014/main" id="{F1C0AD39-21E8-47C5-E0EE-BAAD1197A9DD}"/>
+                <a16:creationId xmlns:a16="http://schemas.microsoft.com/office/drawing/2014/main" id="{F868A926-BFE7-EB9C-F63B-3843EC513BB6}"/>
               </a:ext>
             </a:extLst>
           </p:cNvPr>
@@ -4553,7 +4601,7 @@
           <a:p>
             <a:r>
               <a:rPr lang="en-US" dirty="0"/>
-              <a:t>Collate</a:t>
+              <a:t>Creating Sequences</a:t>
             </a:r>
           </a:p>
         </p:txBody>
@@ -4563,7 +4611,7 @@
           <p:cNvPr id="3" name="Content Placeholder 2">
             <a:extLst>
               <a:ext uri="{FF2B5EF4-FFF2-40B4-BE49-F238E27FC236}">
-                <a16:creationId xmlns:a16="http://schemas.microsoft.com/office/drawing/2014/main" id="{A5618836-B749-2129-D719-196B6F4D4B34}"/>
+                <a16:creationId xmlns:a16="http://schemas.microsoft.com/office/drawing/2014/main" id="{E40C557B-576C-A171-136A-452E4FC2469F}"/>
               </a:ext>
             </a:extLst>
           </p:cNvPr>
@@ -4574,62 +4622,76 @@
             <p:ph idx="1"/>
           </p:nvPr>
         </p:nvSpPr>
-        <p:spPr/>
-        <p:txBody>
-          <a:bodyPr/>
-          <a:lstStyle/>
-          <a:p>
-            <a:r>
-              <a:rPr lang="en-US" dirty="0"/>
-              <a:t>Collate functions can be used to provide a batch, in some different way. </a:t>
-            </a:r>
-          </a:p>
-          <a:p>
-            <a:pPr lvl="1"/>
-            <a:r>
-              <a:rPr lang="en-US" dirty="0"/>
-              <a:t>The </a:t>
+        <p:spPr>
+          <a:xfrm>
+            <a:off x="1451579" y="2015732"/>
+            <a:ext cx="9603275" cy="4037749"/>
+          </a:xfrm>
+        </p:spPr>
+        <p:txBody>
+          <a:bodyPr>
+            <a:normAutofit/>
+          </a:bodyPr>
+          <a:lstStyle/>
+          <a:p>
+            <a:r>
+              <a:rPr lang="en-US" dirty="0"/>
+              <a:t>Packed sequences remove padded elements before computation</a:t>
+            </a:r>
+          </a:p>
+          <a:p>
+            <a:pPr lvl="1"/>
+            <a:r>
+              <a:rPr lang="en-US" dirty="0"/>
+              <a:t>Created using </a:t>
             </a:r>
             <a:r>
               <a:rPr lang="en-US" dirty="0" err="1"/>
-              <a:t>dataloader</a:t>
-            </a:r>
-            <a:r>
-              <a:rPr lang="en-US" dirty="0"/>
-              <a:t> is provided the function, and calls it to get data. </a:t>
-            </a:r>
-          </a:p>
-          <a:p>
-            <a:r>
-              <a:rPr lang="en-US" dirty="0"/>
-              <a:t>This function can do anything. </a:t>
-            </a:r>
-          </a:p>
-          <a:p>
-            <a:pPr lvl="1"/>
-            <a:r>
-              <a:rPr lang="en-US" dirty="0"/>
-              <a:t>Ours will take the data and create the sequences. </a:t>
-            </a:r>
-          </a:p>
-          <a:p>
-            <a:r>
-              <a:rPr lang="en-US" dirty="0"/>
-              <a:t>Our collate will allow padding to be to max length of batch. </a:t>
-            </a:r>
-          </a:p>
-          <a:p>
-            <a:r>
-              <a:rPr lang="en-US" dirty="0"/>
-              <a:t>When the </a:t>
+              <a:t>pack_padded_sequence</a:t>
+            </a:r>
+            <a:r>
+              <a:rPr lang="en-US" dirty="0"/>
+              <a:t>()</a:t>
+            </a:r>
+          </a:p>
+          <a:p>
+            <a:r>
+              <a:rPr lang="en-US" dirty="0"/>
+              <a:t>To pack the sequences, we need:</a:t>
+            </a:r>
+          </a:p>
+          <a:p>
+            <a:pPr lvl="1"/>
+            <a:r>
+              <a:rPr lang="en-US" dirty="0"/>
+              <a:t>Actual sequence lengths.</a:t>
+            </a:r>
+          </a:p>
+          <a:p>
+            <a:pPr lvl="1"/>
+            <a:r>
+              <a:rPr lang="en-US" dirty="0"/>
+              <a:t>Sequences are sorted by length or the </a:t>
             </a:r>
             <a:r>
               <a:rPr lang="en-US" dirty="0" err="1"/>
-              <a:t>dataloader</a:t>
-            </a:r>
-            <a:r>
-              <a:rPr lang="en-US" dirty="0"/>
-              <a:t> wants data, it’ll get a padded sequence, instead of a tensor. </a:t>
+              <a:t>enforce_sorted</a:t>
+            </a:r>
+            <a:r>
+              <a:rPr lang="en-US" dirty="0"/>
+              <a:t> is False. </a:t>
+            </a:r>
+          </a:p>
+          <a:p>
+            <a:r>
+              <a:rPr lang="en-US" dirty="0"/>
+              <a:t>Allows for model to not deal with useless padding data. </a:t>
+            </a:r>
+          </a:p>
+          <a:p>
+            <a:r>
+              <a:rPr lang="en-US" dirty="0"/>
+              <a:t>Helps convergence in many cases. </a:t>
             </a:r>
           </a:p>
         </p:txBody>
@@ -4637,7 +4699,7 @@
     </p:spTree>
     <p:extLst>
       <p:ext uri="{BB962C8B-B14F-4D97-AF65-F5344CB8AC3E}">
-        <p14:creationId xmlns:p14="http://schemas.microsoft.com/office/powerpoint/2010/main" val="688961462"/>
+        <p14:creationId xmlns:p14="http://schemas.microsoft.com/office/powerpoint/2010/main" val="148726018"/>
       </p:ext>
     </p:extLst>
   </p:cSld>
@@ -4669,7 +4731,7 @@
           <p:cNvPr id="2" name="Title 1">
             <a:extLst>
               <a:ext uri="{FF2B5EF4-FFF2-40B4-BE49-F238E27FC236}">
-                <a16:creationId xmlns:a16="http://schemas.microsoft.com/office/drawing/2014/main" id="{DD7CCEAA-E3C6-76D8-2022-77F80BF6FEC4}"/>
+                <a16:creationId xmlns:a16="http://schemas.microsoft.com/office/drawing/2014/main" id="{F1C0AD39-21E8-47C5-E0EE-BAAD1197A9DD}"/>
               </a:ext>
             </a:extLst>
           </p:cNvPr>
@@ -4687,7 +4749,7 @@
           <a:p>
             <a:r>
               <a:rPr lang="en-US" dirty="0"/>
-              <a:t>NLP Classifications</a:t>
+              <a:t>Collate</a:t>
             </a:r>
           </a:p>
         </p:txBody>
@@ -4697,7 +4759,7 @@
           <p:cNvPr id="3" name="Content Placeholder 2">
             <a:extLst>
               <a:ext uri="{FF2B5EF4-FFF2-40B4-BE49-F238E27FC236}">
-                <a16:creationId xmlns:a16="http://schemas.microsoft.com/office/drawing/2014/main" id="{917A3C68-4E5C-269F-4146-6D014ED4D93F}"/>
+                <a16:creationId xmlns:a16="http://schemas.microsoft.com/office/drawing/2014/main" id="{A5618836-B749-2129-D719-196B6F4D4B34}"/>
               </a:ext>
             </a:extLst>
           </p:cNvPr>
@@ -4715,33 +4777,55 @@
           <a:p>
             <a:r>
               <a:rPr lang="en-US" dirty="0"/>
-              <a:t>Our LSTM model will perform similarly to CNN models when doing classification. </a:t>
-            </a:r>
-          </a:p>
-          <a:p>
-            <a:pPr lvl="1"/>
-            <a:r>
-              <a:rPr lang="en-US" dirty="0"/>
-              <a:t>The recurrent layers will transform the sequence to features. </a:t>
-            </a:r>
-          </a:p>
-          <a:p>
-            <a:pPr lvl="1"/>
-            <a:r>
-              <a:rPr lang="en-US" dirty="0"/>
-              <a:t>The dense layers will transform these to a prediction. </a:t>
-            </a:r>
-          </a:p>
-          <a:p>
-            <a:r>
-              <a:rPr lang="en-US" dirty="0"/>
-              <a:t>Remember, given these features, we can predict anything we set as target. </a:t>
-            </a:r>
-          </a:p>
-          <a:p>
-            <a:r>
-              <a:rPr lang="en-US" dirty="0"/>
-              <a:t>Bidirectional is more likely to be helpful here. </a:t>
+              <a:t>Collate functions can be used to provide a batch, in some different way. </a:t>
+            </a:r>
+          </a:p>
+          <a:p>
+            <a:pPr lvl="1"/>
+            <a:r>
+              <a:rPr lang="en-US" dirty="0"/>
+              <a:t>The </a:t>
+            </a:r>
+            <a:r>
+              <a:rPr lang="en-US" dirty="0" err="1"/>
+              <a:t>dataloader</a:t>
+            </a:r>
+            <a:r>
+              <a:rPr lang="en-US" dirty="0"/>
+              <a:t> is provided the function, and calls it to get data. </a:t>
+            </a:r>
+          </a:p>
+          <a:p>
+            <a:r>
+              <a:rPr lang="en-US" dirty="0"/>
+              <a:t>This function can do anything. </a:t>
+            </a:r>
+          </a:p>
+          <a:p>
+            <a:pPr lvl="1"/>
+            <a:r>
+              <a:rPr lang="en-US" dirty="0"/>
+              <a:t>Ours will take the data and create the sequences. </a:t>
+            </a:r>
+          </a:p>
+          <a:p>
+            <a:r>
+              <a:rPr lang="en-US" dirty="0"/>
+              <a:t>Our collate will allow padding to be to max length of batch. </a:t>
+            </a:r>
+          </a:p>
+          <a:p>
+            <a:r>
+              <a:rPr lang="en-US" dirty="0"/>
+              <a:t>When the </a:t>
+            </a:r>
+            <a:r>
+              <a:rPr lang="en-US" dirty="0" err="1"/>
+              <a:t>dataloader</a:t>
+            </a:r>
+            <a:r>
+              <a:rPr lang="en-US" dirty="0"/>
+              <a:t> wants data, it’ll get a padded sequence, instead of a tensor. </a:t>
             </a:r>
           </a:p>
         </p:txBody>
@@ -4749,7 +4833,7 @@
     </p:spTree>
     <p:extLst>
       <p:ext uri="{BB962C8B-B14F-4D97-AF65-F5344CB8AC3E}">
-        <p14:creationId xmlns:p14="http://schemas.microsoft.com/office/powerpoint/2010/main" val="1828430297"/>
+        <p14:creationId xmlns:p14="http://schemas.microsoft.com/office/powerpoint/2010/main" val="688961462"/>
       </p:ext>
     </p:extLst>
   </p:cSld>
@@ -4781,7 +4865,7 @@
           <p:cNvPr id="2" name="Title 1">
             <a:extLst>
               <a:ext uri="{FF2B5EF4-FFF2-40B4-BE49-F238E27FC236}">
-                <a16:creationId xmlns:a16="http://schemas.microsoft.com/office/drawing/2014/main" id="{FB3AFEF8-3AE6-F00C-DBC6-7F73C9883CB0}"/>
+                <a16:creationId xmlns:a16="http://schemas.microsoft.com/office/drawing/2014/main" id="{DD7CCEAA-E3C6-76D8-2022-77F80BF6FEC4}"/>
               </a:ext>
             </a:extLst>
           </p:cNvPr>
@@ -4799,7 +4883,7 @@
           <a:p>
             <a:r>
               <a:rPr lang="en-US" dirty="0"/>
-              <a:t>Multi-Label Classifications</a:t>
+              <a:t>NLP Classifications</a:t>
             </a:r>
           </a:p>
         </p:txBody>
@@ -4809,7 +4893,7 @@
           <p:cNvPr id="3" name="Content Placeholder 2">
             <a:extLst>
               <a:ext uri="{FF2B5EF4-FFF2-40B4-BE49-F238E27FC236}">
-                <a16:creationId xmlns:a16="http://schemas.microsoft.com/office/drawing/2014/main" id="{4AF7F43E-AC27-CB8C-A5D2-948E5AA8CC06}"/>
+                <a16:creationId xmlns:a16="http://schemas.microsoft.com/office/drawing/2014/main" id="{917A3C68-4E5C-269F-4146-6D014ED4D93F}"/>
               </a:ext>
             </a:extLst>
           </p:cNvPr>
@@ -4820,82 +4904,40 @@
             <p:ph idx="1"/>
           </p:nvPr>
         </p:nvSpPr>
-        <p:spPr>
-          <a:xfrm>
-            <a:off x="1451579" y="1853754"/>
-            <a:ext cx="9603275" cy="4199727"/>
-          </a:xfrm>
-        </p:spPr>
-        <p:txBody>
-          <a:bodyPr/>
-          <a:lstStyle/>
-          <a:p>
-            <a:r>
-              <a:rPr lang="en-US" dirty="0"/>
-              <a:t>Our predictions are determined by the output shape and the values we put there. </a:t>
-            </a:r>
-          </a:p>
-          <a:p>
-            <a:r>
-              <a:rPr lang="en-US" dirty="0"/>
-              <a:t>One thing we can do is multi-label classifications. </a:t>
-            </a:r>
-          </a:p>
-          <a:p>
-            <a:pPr lvl="1"/>
-            <a:r>
-              <a:rPr lang="en-US" dirty="0"/>
-              <a:t>Predict membership of several classes, irrespective of each other. </a:t>
-            </a:r>
-          </a:p>
-          <a:p>
-            <a:pPr lvl="1"/>
-            <a:r>
-              <a:rPr lang="en-US" dirty="0"/>
-              <a:t>E.g. is this person a runner, cyclist, swimmer, skier, </a:t>
-            </a:r>
-            <a:r>
-              <a:rPr lang="en-US" dirty="0" err="1"/>
-              <a:t>etc</a:t>
-            </a:r>
-            <a:r>
-              <a:rPr lang="en-US" dirty="0"/>
-              <a:t>… </a:t>
-            </a:r>
-          </a:p>
-          <a:p>
-            <a:r>
-              <a:rPr lang="en-US" dirty="0"/>
-              <a:t>Setup:</a:t>
-            </a:r>
-          </a:p>
-          <a:p>
-            <a:pPr lvl="1"/>
-            <a:r>
-              <a:rPr lang="en-US" dirty="0"/>
-              <a:t>Each class gets its own output neuron. </a:t>
-            </a:r>
-          </a:p>
-          <a:p>
-            <a:pPr lvl="1"/>
-            <a:r>
-              <a:rPr lang="en-US" dirty="0"/>
-              <a:t>Each uses a sigmoid individually (no </a:t>
-            </a:r>
-            <a:r>
-              <a:rPr lang="en-US" dirty="0" err="1"/>
-              <a:t>softmax</a:t>
-            </a:r>
-            <a:r>
-              <a:rPr lang="en-US" dirty="0"/>
-              <a:t>) to determine membership. </a:t>
-            </a:r>
-          </a:p>
-          <a:p>
-            <a:pPr lvl="1"/>
-            <a:r>
-              <a:rPr lang="en-US" dirty="0"/>
-              <a:t>Each prediction is like a separate binary classification. </a:t>
+        <p:spPr/>
+        <p:txBody>
+          <a:bodyPr/>
+          <a:lstStyle/>
+          <a:p>
+            <a:r>
+              <a:rPr lang="en-US" dirty="0"/>
+              <a:t>Our LSTM model will perform similarly to CNN models when doing classification. </a:t>
+            </a:r>
+          </a:p>
+          <a:p>
+            <a:pPr lvl="1"/>
+            <a:r>
+              <a:rPr lang="en-US" dirty="0"/>
+              <a:t>The recurrent layers will transform the sequence to features. </a:t>
+            </a:r>
+          </a:p>
+          <a:p>
+            <a:pPr lvl="1"/>
+            <a:r>
+              <a:rPr lang="en-US" dirty="0"/>
+              <a:t>The dense layers will transform these to a prediction. </a:t>
+            </a:r>
+          </a:p>
+          <a:p>
+            <a:r>
+              <a:rPr lang="en-US" dirty="0"/>
+              <a:t>Remember, given these features, we can predict anything we set as target. </a:t>
+            </a:r>
+          </a:p>
+          <a:p>
+            <a:r>
+              <a:rPr lang="en-US" dirty="0"/>
+              <a:t>Bidirectional is more likely to be helpful here. </a:t>
             </a:r>
           </a:p>
         </p:txBody>
@@ -4903,7 +4945,7 @@
     </p:spTree>
     <p:extLst>
       <p:ext uri="{BB962C8B-B14F-4D97-AF65-F5344CB8AC3E}">
-        <p14:creationId xmlns:p14="http://schemas.microsoft.com/office/powerpoint/2010/main" val="67831430"/>
+        <p14:creationId xmlns:p14="http://schemas.microsoft.com/office/powerpoint/2010/main" val="1828430297"/>
       </p:ext>
     </p:extLst>
   </p:cSld>
@@ -4935,6 +4977,160 @@
           <p:cNvPr id="2" name="Title 1">
             <a:extLst>
               <a:ext uri="{FF2B5EF4-FFF2-40B4-BE49-F238E27FC236}">
+                <a16:creationId xmlns:a16="http://schemas.microsoft.com/office/drawing/2014/main" id="{FB3AFEF8-3AE6-F00C-DBC6-7F73C9883CB0}"/>
+              </a:ext>
+            </a:extLst>
+          </p:cNvPr>
+          <p:cNvSpPr>
+            <a:spLocks noGrp="1"/>
+          </p:cNvSpPr>
+          <p:nvPr>
+            <p:ph type="title"/>
+          </p:nvPr>
+        </p:nvSpPr>
+        <p:spPr/>
+        <p:txBody>
+          <a:bodyPr/>
+          <a:lstStyle/>
+          <a:p>
+            <a:r>
+              <a:rPr lang="en-US" dirty="0"/>
+              <a:t>Multi-Label Classifications</a:t>
+            </a:r>
+          </a:p>
+        </p:txBody>
+      </p:sp>
+      <p:sp>
+        <p:nvSpPr>
+          <p:cNvPr id="3" name="Content Placeholder 2">
+            <a:extLst>
+              <a:ext uri="{FF2B5EF4-FFF2-40B4-BE49-F238E27FC236}">
+                <a16:creationId xmlns:a16="http://schemas.microsoft.com/office/drawing/2014/main" id="{4AF7F43E-AC27-CB8C-A5D2-948E5AA8CC06}"/>
+              </a:ext>
+            </a:extLst>
+          </p:cNvPr>
+          <p:cNvSpPr>
+            <a:spLocks noGrp="1"/>
+          </p:cNvSpPr>
+          <p:nvPr>
+            <p:ph idx="1"/>
+          </p:nvPr>
+        </p:nvSpPr>
+        <p:spPr>
+          <a:xfrm>
+            <a:off x="1451579" y="1853754"/>
+            <a:ext cx="9603275" cy="4199727"/>
+          </a:xfrm>
+        </p:spPr>
+        <p:txBody>
+          <a:bodyPr/>
+          <a:lstStyle/>
+          <a:p>
+            <a:r>
+              <a:rPr lang="en-US" dirty="0"/>
+              <a:t>Our predictions are determined by the output shape and the values we put there. </a:t>
+            </a:r>
+          </a:p>
+          <a:p>
+            <a:r>
+              <a:rPr lang="en-US" dirty="0"/>
+              <a:t>One thing we can do is multi-label classifications. </a:t>
+            </a:r>
+          </a:p>
+          <a:p>
+            <a:pPr lvl="1"/>
+            <a:r>
+              <a:rPr lang="en-US" dirty="0"/>
+              <a:t>Predict membership of several classes, irrespective of each other. </a:t>
+            </a:r>
+          </a:p>
+          <a:p>
+            <a:pPr lvl="1"/>
+            <a:r>
+              <a:rPr lang="en-US" dirty="0"/>
+              <a:t>E.g. is this person a runner, cyclist, swimmer, skier, </a:t>
+            </a:r>
+            <a:r>
+              <a:rPr lang="en-US" dirty="0" err="1"/>
+              <a:t>etc</a:t>
+            </a:r>
+            <a:r>
+              <a:rPr lang="en-US" dirty="0"/>
+              <a:t>… </a:t>
+            </a:r>
+          </a:p>
+          <a:p>
+            <a:r>
+              <a:rPr lang="en-US" dirty="0"/>
+              <a:t>Setup:</a:t>
+            </a:r>
+          </a:p>
+          <a:p>
+            <a:pPr lvl="1"/>
+            <a:r>
+              <a:rPr lang="en-US" dirty="0"/>
+              <a:t>Each class gets its own output neuron. </a:t>
+            </a:r>
+          </a:p>
+          <a:p>
+            <a:pPr lvl="1"/>
+            <a:r>
+              <a:rPr lang="en-US" dirty="0"/>
+              <a:t>Each uses a sigmoid individually (no </a:t>
+            </a:r>
+            <a:r>
+              <a:rPr lang="en-US" dirty="0" err="1"/>
+              <a:t>softmax</a:t>
+            </a:r>
+            <a:r>
+              <a:rPr lang="en-US" dirty="0"/>
+              <a:t>) to determine membership. </a:t>
+            </a:r>
+          </a:p>
+          <a:p>
+            <a:pPr lvl="1"/>
+            <a:r>
+              <a:rPr lang="en-US" dirty="0"/>
+              <a:t>Each prediction is like a separate binary classification. </a:t>
+            </a:r>
+          </a:p>
+        </p:txBody>
+      </p:sp>
+    </p:spTree>
+    <p:extLst>
+      <p:ext uri="{BB962C8B-B14F-4D97-AF65-F5344CB8AC3E}">
+        <p14:creationId xmlns:p14="http://schemas.microsoft.com/office/powerpoint/2010/main" val="67831430"/>
+      </p:ext>
+    </p:extLst>
+  </p:cSld>
+  <p:clrMapOvr>
+    <a:masterClrMapping/>
+  </p:clrMapOvr>
+</p:sld>
+</file>
+
+<file path=ppt/slides/slide19.xml><?xml version="1.0" encoding="utf-8"?>
+<p:sld xmlns:a="http://schemas.openxmlformats.org/drawingml/2006/main" xmlns:r="http://schemas.openxmlformats.org/officeDocument/2006/relationships" xmlns:p="http://schemas.openxmlformats.org/presentationml/2006/main">
+  <p:cSld>
+    <p:spTree>
+      <p:nvGrpSpPr>
+        <p:cNvPr id="1" name=""/>
+        <p:cNvGrpSpPr/>
+        <p:nvPr/>
+      </p:nvGrpSpPr>
+      <p:grpSpPr>
+        <a:xfrm>
+          <a:off x="0" y="0"/>
+          <a:ext cx="0" cy="0"/>
+          <a:chOff x="0" y="0"/>
+          <a:chExt cx="0" cy="0"/>
+        </a:xfrm>
+      </p:grpSpPr>
+      <p:sp>
+        <p:nvSpPr>
+          <p:cNvPr id="2" name="Title 1">
+            <a:extLst>
+              <a:ext uri="{FF2B5EF4-FFF2-40B4-BE49-F238E27FC236}">
                 <a16:creationId xmlns:a16="http://schemas.microsoft.com/office/drawing/2014/main" id="{4C96BE8B-30F3-49E8-4566-2FDC2DC41D51}"/>
               </a:ext>
             </a:extLst>
@@ -5051,7 +5247,93 @@
 </p:sld>
 </file>
 
-<file path=ppt/slides/slide19.xml><?xml version="1.0" encoding="utf-8"?>
+<file path=ppt/slides/slide2.xml><?xml version="1.0" encoding="utf-8"?>
+<p:sld xmlns:a="http://schemas.openxmlformats.org/drawingml/2006/main" xmlns:r="http://schemas.openxmlformats.org/officeDocument/2006/relationships" xmlns:p="http://schemas.openxmlformats.org/presentationml/2006/main">
+  <p:cSld>
+    <p:spTree>
+      <p:nvGrpSpPr>
+        <p:cNvPr id="1" name=""/>
+        <p:cNvGrpSpPr/>
+        <p:nvPr/>
+      </p:nvGrpSpPr>
+      <p:grpSpPr>
+        <a:xfrm>
+          <a:off x="0" y="0"/>
+          <a:ext cx="0" cy="0"/>
+          <a:chOff x="0" y="0"/>
+          <a:chExt cx="0" cy="0"/>
+        </a:xfrm>
+      </p:grpSpPr>
+      <p:sp>
+        <p:nvSpPr>
+          <p:cNvPr id="2" name="Title 1">
+            <a:extLst>
+              <a:ext uri="{FF2B5EF4-FFF2-40B4-BE49-F238E27FC236}">
+                <a16:creationId xmlns:a16="http://schemas.microsoft.com/office/drawing/2014/main" id="{ABC37063-C909-0A13-60AD-41C7D4D5DE06}"/>
+              </a:ext>
+            </a:extLst>
+          </p:cNvPr>
+          <p:cNvSpPr>
+            <a:spLocks noGrp="1"/>
+          </p:cNvSpPr>
+          <p:nvPr>
+            <p:ph type="ctrTitle"/>
+          </p:nvPr>
+        </p:nvSpPr>
+        <p:spPr/>
+        <p:txBody>
+          <a:bodyPr/>
+          <a:lstStyle/>
+          <a:p>
+            <a:r>
+              <a:rPr lang="en-US" dirty="0"/>
+              <a:t>NLP with Neural Networks</a:t>
+            </a:r>
+          </a:p>
+        </p:txBody>
+      </p:sp>
+      <p:sp>
+        <p:nvSpPr>
+          <p:cNvPr id="3" name="Subtitle 2">
+            <a:extLst>
+              <a:ext uri="{FF2B5EF4-FFF2-40B4-BE49-F238E27FC236}">
+                <a16:creationId xmlns:a16="http://schemas.microsoft.com/office/drawing/2014/main" id="{99DAAC53-1207-9192-57D0-271B0FA2B9A3}"/>
+              </a:ext>
+            </a:extLst>
+          </p:cNvPr>
+          <p:cNvSpPr>
+            <a:spLocks noGrp="1"/>
+          </p:cNvSpPr>
+          <p:nvPr>
+            <p:ph type="subTitle" idx="1"/>
+          </p:nvPr>
+        </p:nvSpPr>
+        <p:spPr/>
+        <p:txBody>
+          <a:bodyPr/>
+          <a:lstStyle/>
+          <a:p>
+            <a:r>
+              <a:rPr lang="en-US" dirty="0"/>
+              <a:t>Classification</a:t>
+            </a:r>
+          </a:p>
+        </p:txBody>
+      </p:sp>
+    </p:spTree>
+    <p:extLst>
+      <p:ext uri="{BB962C8B-B14F-4D97-AF65-F5344CB8AC3E}">
+        <p14:creationId xmlns:p14="http://schemas.microsoft.com/office/powerpoint/2010/main" val="2699339543"/>
+      </p:ext>
+    </p:extLst>
+  </p:cSld>
+  <p:clrMapOvr>
+    <a:masterClrMapping/>
+  </p:clrMapOvr>
+</p:sld>
+</file>
+
+<file path=ppt/slides/slide20.xml><?xml version="1.0" encoding="utf-8"?>
 <p:sld xmlns:a="http://schemas.openxmlformats.org/drawingml/2006/main" xmlns:r="http://schemas.openxmlformats.org/officeDocument/2006/relationships" xmlns:p="http://schemas.openxmlformats.org/presentationml/2006/main">
   <p:cSld>
     <p:spTree>
@@ -5201,7 +5483,7 @@
 </p:sld>
 </file>
 
-<file path=ppt/slides/slide2.xml><?xml version="1.0" encoding="utf-8"?>
+<file path=ppt/slides/slide21.xml><?xml version="1.0" encoding="utf-8"?>
 <p:sld xmlns:a="http://schemas.openxmlformats.org/drawingml/2006/main" xmlns:r="http://schemas.openxmlformats.org/officeDocument/2006/relationships" xmlns:p="http://schemas.openxmlformats.org/presentationml/2006/main">
   <p:cSld>
     <p:spTree>
@@ -5223,92 +5505,6 @@
           <p:cNvPr id="2" name="Title 1">
             <a:extLst>
               <a:ext uri="{FF2B5EF4-FFF2-40B4-BE49-F238E27FC236}">
-                <a16:creationId xmlns:a16="http://schemas.microsoft.com/office/drawing/2014/main" id="{ABC37063-C909-0A13-60AD-41C7D4D5DE06}"/>
-              </a:ext>
-            </a:extLst>
-          </p:cNvPr>
-          <p:cNvSpPr>
-            <a:spLocks noGrp="1"/>
-          </p:cNvSpPr>
-          <p:nvPr>
-            <p:ph type="ctrTitle"/>
-          </p:nvPr>
-        </p:nvSpPr>
-        <p:spPr/>
-        <p:txBody>
-          <a:bodyPr/>
-          <a:lstStyle/>
-          <a:p>
-            <a:r>
-              <a:rPr lang="en-US" dirty="0"/>
-              <a:t>NLP with Neural Networks</a:t>
-            </a:r>
-          </a:p>
-        </p:txBody>
-      </p:sp>
-      <p:sp>
-        <p:nvSpPr>
-          <p:cNvPr id="3" name="Subtitle 2">
-            <a:extLst>
-              <a:ext uri="{FF2B5EF4-FFF2-40B4-BE49-F238E27FC236}">
-                <a16:creationId xmlns:a16="http://schemas.microsoft.com/office/drawing/2014/main" id="{99DAAC53-1207-9192-57D0-271B0FA2B9A3}"/>
-              </a:ext>
-            </a:extLst>
-          </p:cNvPr>
-          <p:cNvSpPr>
-            <a:spLocks noGrp="1"/>
-          </p:cNvSpPr>
-          <p:nvPr>
-            <p:ph type="subTitle" idx="1"/>
-          </p:nvPr>
-        </p:nvSpPr>
-        <p:spPr/>
-        <p:txBody>
-          <a:bodyPr/>
-          <a:lstStyle/>
-          <a:p>
-            <a:r>
-              <a:rPr lang="en-US" dirty="0"/>
-              <a:t>Classification</a:t>
-            </a:r>
-          </a:p>
-        </p:txBody>
-      </p:sp>
-    </p:spTree>
-    <p:extLst>
-      <p:ext uri="{BB962C8B-B14F-4D97-AF65-F5344CB8AC3E}">
-        <p14:creationId xmlns:p14="http://schemas.microsoft.com/office/powerpoint/2010/main" val="2699339543"/>
-      </p:ext>
-    </p:extLst>
-  </p:cSld>
-  <p:clrMapOvr>
-    <a:masterClrMapping/>
-  </p:clrMapOvr>
-</p:sld>
-</file>
-
-<file path=ppt/slides/slide20.xml><?xml version="1.0" encoding="utf-8"?>
-<p:sld xmlns:a="http://schemas.openxmlformats.org/drawingml/2006/main" xmlns:r="http://schemas.openxmlformats.org/officeDocument/2006/relationships" xmlns:p="http://schemas.openxmlformats.org/presentationml/2006/main">
-  <p:cSld>
-    <p:spTree>
-      <p:nvGrpSpPr>
-        <p:cNvPr id="1" name=""/>
-        <p:cNvGrpSpPr/>
-        <p:nvPr/>
-      </p:nvGrpSpPr>
-      <p:grpSpPr>
-        <a:xfrm>
-          <a:off x="0" y="0"/>
-          <a:ext cx="0" cy="0"/>
-          <a:chOff x="0" y="0"/>
-          <a:chExt cx="0" cy="0"/>
-        </a:xfrm>
-      </p:grpSpPr>
-      <p:sp>
-        <p:nvSpPr>
-          <p:cNvPr id="2" name="Title 1">
-            <a:extLst>
-              <a:ext uri="{FF2B5EF4-FFF2-40B4-BE49-F238E27FC236}">
                 <a16:creationId xmlns:a16="http://schemas.microsoft.com/office/drawing/2014/main" id="{03DE50C1-4E3A-5BF8-826D-B9BBAA2A4337}"/>
               </a:ext>
             </a:extLst>
@@ -5423,7 +5619,7 @@
 </p:sld>
 </file>
 
-<file path=ppt/slides/slide21.xml><?xml version="1.0" encoding="utf-8"?>
+<file path=ppt/slides/slide22.xml><?xml version="1.0" encoding="utf-8"?>
 <p:sld xmlns:a="http://schemas.openxmlformats.org/drawingml/2006/main" xmlns:r="http://schemas.openxmlformats.org/officeDocument/2006/relationships" xmlns:p="http://schemas.openxmlformats.org/presentationml/2006/main">
   <p:cSld>
     <p:spTree>
@@ -5587,7 +5783,7 @@
 </p:sld>
 </file>
 
-<file path=ppt/slides/slide22.xml><?xml version="1.0" encoding="utf-8"?>
+<file path=ppt/slides/slide23.xml><?xml version="1.0" encoding="utf-8"?>
 <p:sld xmlns:a="http://schemas.openxmlformats.org/drawingml/2006/main" xmlns:r="http://schemas.openxmlformats.org/officeDocument/2006/relationships" xmlns:p="http://schemas.openxmlformats.org/presentationml/2006/main">
   <p:cSld>
     <p:spTree>
@@ -5627,7 +5823,7 @@
           <a:p>
             <a:r>
               <a:rPr lang="en-US" dirty="0"/>
-              <a:t>Neural (Network) Plasticity</a:t>
+              <a:t>Neuro (Network) Plasticity</a:t>
             </a:r>
           </a:p>
         </p:txBody>
@@ -5788,7 +5984,7 @@
 </p:sld>
 </file>
 
-<file path=ppt/slides/slide23.xml><?xml version="1.0" encoding="utf-8"?>
+<file path=ppt/slides/slide24.xml><?xml version="1.0" encoding="utf-8"?>
 <p:sld xmlns:a="http://schemas.openxmlformats.org/drawingml/2006/main" xmlns:r="http://schemas.openxmlformats.org/officeDocument/2006/relationships" xmlns:p="http://schemas.openxmlformats.org/presentationml/2006/main">
   <p:cSld>
     <p:spTree>
@@ -5973,155 +6169,57 @@
           </a:extLst>
         </p:spPr>
       </p:pic>
+      <p:pic>
+        <p:nvPicPr>
+          <p:cNvPr id="8196" name="Picture 4" descr="How to Calculate R-Squared in Excel (RSQ, LINEST, Trendline, ToolPak)">
+            <a:extLst>
+              <a:ext uri="{FF2B5EF4-FFF2-40B4-BE49-F238E27FC236}">
+                <a16:creationId xmlns:a16="http://schemas.microsoft.com/office/drawing/2014/main" id="{F74681EE-8063-04A0-1BD7-00C9A6BA299C}"/>
+              </a:ext>
+            </a:extLst>
+          </p:cNvPr>
+          <p:cNvPicPr>
+            <a:picLocks noChangeAspect="1" noChangeArrowheads="1"/>
+          </p:cNvPicPr>
+          <p:nvPr/>
+        </p:nvPicPr>
+        <p:blipFill>
+          <a:blip r:embed="rId3">
+            <a:extLst>
+              <a:ext uri="{28A0092B-C50C-407E-A947-70E740481C1C}">
+                <a14:useLocalDpi xmlns:a14="http://schemas.microsoft.com/office/drawing/2010/main" val="0"/>
+              </a:ext>
+            </a:extLst>
+          </a:blip>
+          <a:srcRect/>
+          <a:stretch>
+            <a:fillRect/>
+          </a:stretch>
+        </p:blipFill>
+        <p:spPr bwMode="auto">
+          <a:xfrm>
+            <a:off x="7376822" y="0"/>
+            <a:ext cx="4815178" cy="1809203"/>
+          </a:xfrm>
+          <a:prstGeom prst="rect">
+            <a:avLst/>
+          </a:prstGeom>
+          <a:noFill/>
+          <a:extLst>
+            <a:ext uri="{909E8E84-426E-40DD-AFC4-6F175D3DCCD1}">
+              <a14:hiddenFill xmlns:a14="http://schemas.microsoft.com/office/drawing/2010/main">
+                <a:solidFill>
+                  <a:srgbClr val="FFFFFF"/>
+                </a:solidFill>
+              </a14:hiddenFill>
+            </a:ext>
+          </a:extLst>
+        </p:spPr>
+      </p:pic>
     </p:spTree>
     <p:extLst>
       <p:ext uri="{BB962C8B-B14F-4D97-AF65-F5344CB8AC3E}">
         <p14:creationId xmlns:p14="http://schemas.microsoft.com/office/powerpoint/2010/main" val="2849659372"/>
-      </p:ext>
-    </p:extLst>
-  </p:cSld>
-  <p:clrMapOvr>
-    <a:masterClrMapping/>
-  </p:clrMapOvr>
-</p:sld>
-</file>
-
-<file path=ppt/slides/slide24.xml><?xml version="1.0" encoding="utf-8"?>
-<p:sld xmlns:a="http://schemas.openxmlformats.org/drawingml/2006/main" xmlns:r="http://schemas.openxmlformats.org/officeDocument/2006/relationships" xmlns:p="http://schemas.openxmlformats.org/presentationml/2006/main">
-  <p:cSld>
-    <p:spTree>
-      <p:nvGrpSpPr>
-        <p:cNvPr id="1" name=""/>
-        <p:cNvGrpSpPr/>
-        <p:nvPr/>
-      </p:nvGrpSpPr>
-      <p:grpSpPr>
-        <a:xfrm>
-          <a:off x="0" y="0"/>
-          <a:ext cx="0" cy="0"/>
-          <a:chOff x="0" y="0"/>
-          <a:chExt cx="0" cy="0"/>
-        </a:xfrm>
-      </p:grpSpPr>
-      <p:sp>
-        <p:nvSpPr>
-          <p:cNvPr id="2" name="Title 1">
-            <a:extLst>
-              <a:ext uri="{FF2B5EF4-FFF2-40B4-BE49-F238E27FC236}">
-                <a16:creationId xmlns:a16="http://schemas.microsoft.com/office/drawing/2014/main" id="{E8809500-ECBE-43C0-011C-C81C3F5B2387}"/>
-              </a:ext>
-            </a:extLst>
-          </p:cNvPr>
-          <p:cNvSpPr>
-            <a:spLocks noGrp="1"/>
-          </p:cNvSpPr>
-          <p:nvPr>
-            <p:ph type="title"/>
-          </p:nvPr>
-        </p:nvSpPr>
-        <p:spPr/>
-        <p:txBody>
-          <a:bodyPr/>
-          <a:lstStyle/>
-          <a:p>
-            <a:r>
-              <a:rPr lang="en-US" dirty="0"/>
-              <a:t>LSTMs and NLP</a:t>
-            </a:r>
-          </a:p>
-        </p:txBody>
-      </p:sp>
-      <p:sp>
-        <p:nvSpPr>
-          <p:cNvPr id="3" name="Content Placeholder 2">
-            <a:extLst>
-              <a:ext uri="{FF2B5EF4-FFF2-40B4-BE49-F238E27FC236}">
-                <a16:creationId xmlns:a16="http://schemas.microsoft.com/office/drawing/2014/main" id="{097C3D0A-8D65-E2E5-3FA8-3CC897E683E7}"/>
-              </a:ext>
-            </a:extLst>
-          </p:cNvPr>
-          <p:cNvSpPr>
-            <a:spLocks noGrp="1"/>
-          </p:cNvSpPr>
-          <p:nvPr>
-            <p:ph idx="1"/>
-          </p:nvPr>
-        </p:nvSpPr>
-        <p:spPr>
-          <a:xfrm>
-            <a:off x="1451579" y="1853754"/>
-            <a:ext cx="9603275" cy="4199727"/>
-          </a:xfrm>
-        </p:spPr>
-        <p:txBody>
-          <a:bodyPr/>
-          <a:lstStyle/>
-          <a:p>
-            <a:r>
-              <a:rPr lang="en-US" dirty="0"/>
-              <a:t>LSTM models were good performers at text generation and similar, before transformers. </a:t>
-            </a:r>
-          </a:p>
-          <a:p>
-            <a:pPr lvl="1"/>
-            <a:r>
-              <a:rPr lang="en-US" dirty="0"/>
-              <a:t>Given a sequence of tokens, what is the next token? </a:t>
-            </a:r>
-          </a:p>
-          <a:p>
-            <a:pPr lvl="1"/>
-            <a:r>
-              <a:rPr lang="en-US" dirty="0"/>
-              <a:t>Transformer models are (much) smarter at tracking relevance (e.g. this word is important to the words that come later). </a:t>
-            </a:r>
-          </a:p>
-          <a:p>
-            <a:r>
-              <a:rPr lang="en-US" dirty="0"/>
-              <a:t>There’s not </a:t>
-            </a:r>
-            <a:r>
-              <a:rPr lang="en-US" i="1" dirty="0"/>
-              <a:t>that</a:t>
-            </a:r>
-            <a:r>
-              <a:rPr lang="en-US" dirty="0"/>
-              <a:t> strict of a separation of model types sometimes. </a:t>
-            </a:r>
-          </a:p>
-          <a:p>
-            <a:pPr lvl="1"/>
-            <a:r>
-              <a:rPr lang="en-US" dirty="0"/>
-              <a:t>You can predict text stuff with CNNs and image stuff with RNNs. </a:t>
-            </a:r>
-          </a:p>
-          <a:p>
-            <a:pPr lvl="1"/>
-            <a:r>
-              <a:rPr lang="en-US" dirty="0"/>
-              <a:t>Layers can also be mix and matched inside models – </a:t>
-            </a:r>
-            <a:r>
-              <a:rPr lang="en-US" dirty="0" err="1"/>
-              <a:t>resnet</a:t>
-            </a:r>
-            <a:r>
-              <a:rPr lang="en-US" dirty="0"/>
-              <a:t> image models have recurrent bits. </a:t>
-            </a:r>
-          </a:p>
-          <a:p>
-            <a:pPr lvl="1"/>
-            <a:endParaRPr lang="en-US" dirty="0"/>
-          </a:p>
-        </p:txBody>
-      </p:sp>
-    </p:spTree>
-    <p:extLst>
-      <p:ext uri="{BB962C8B-B14F-4D97-AF65-F5344CB8AC3E}">
-        <p14:creationId xmlns:p14="http://schemas.microsoft.com/office/powerpoint/2010/main" val="659072108"/>
       </p:ext>
     </p:extLst>
   </p:cSld>
@@ -6153,6 +6251,151 @@
           <p:cNvPr id="2" name="Title 1">
             <a:extLst>
               <a:ext uri="{FF2B5EF4-FFF2-40B4-BE49-F238E27FC236}">
+                <a16:creationId xmlns:a16="http://schemas.microsoft.com/office/drawing/2014/main" id="{E8809500-ECBE-43C0-011C-C81C3F5B2387}"/>
+              </a:ext>
+            </a:extLst>
+          </p:cNvPr>
+          <p:cNvSpPr>
+            <a:spLocks noGrp="1"/>
+          </p:cNvSpPr>
+          <p:nvPr>
+            <p:ph type="title"/>
+          </p:nvPr>
+        </p:nvSpPr>
+        <p:spPr/>
+        <p:txBody>
+          <a:bodyPr/>
+          <a:lstStyle/>
+          <a:p>
+            <a:r>
+              <a:rPr lang="en-US" dirty="0"/>
+              <a:t>LSTMs and NLP</a:t>
+            </a:r>
+          </a:p>
+        </p:txBody>
+      </p:sp>
+      <p:sp>
+        <p:nvSpPr>
+          <p:cNvPr id="3" name="Content Placeholder 2">
+            <a:extLst>
+              <a:ext uri="{FF2B5EF4-FFF2-40B4-BE49-F238E27FC236}">
+                <a16:creationId xmlns:a16="http://schemas.microsoft.com/office/drawing/2014/main" id="{097C3D0A-8D65-E2E5-3FA8-3CC897E683E7}"/>
+              </a:ext>
+            </a:extLst>
+          </p:cNvPr>
+          <p:cNvSpPr>
+            <a:spLocks noGrp="1"/>
+          </p:cNvSpPr>
+          <p:nvPr>
+            <p:ph idx="1"/>
+          </p:nvPr>
+        </p:nvSpPr>
+        <p:spPr>
+          <a:xfrm>
+            <a:off x="1451579" y="1853754"/>
+            <a:ext cx="9603275" cy="4199727"/>
+          </a:xfrm>
+        </p:spPr>
+        <p:txBody>
+          <a:bodyPr/>
+          <a:lstStyle/>
+          <a:p>
+            <a:r>
+              <a:rPr lang="en-US" dirty="0"/>
+              <a:t>LSTM models were good performers at text generation and similar, before transformers. </a:t>
+            </a:r>
+          </a:p>
+          <a:p>
+            <a:pPr lvl="1"/>
+            <a:r>
+              <a:rPr lang="en-US" dirty="0"/>
+              <a:t>Given a sequence of tokens, what is the next token? </a:t>
+            </a:r>
+          </a:p>
+          <a:p>
+            <a:pPr lvl="1"/>
+            <a:r>
+              <a:rPr lang="en-US" dirty="0"/>
+              <a:t>Transformer models are (much) smarter at tracking relevance (e.g. this word is important to the words that come later). </a:t>
+            </a:r>
+          </a:p>
+          <a:p>
+            <a:r>
+              <a:rPr lang="en-US" dirty="0"/>
+              <a:t>There’s not </a:t>
+            </a:r>
+            <a:r>
+              <a:rPr lang="en-US" i="1" dirty="0"/>
+              <a:t>that</a:t>
+            </a:r>
+            <a:r>
+              <a:rPr lang="en-US" dirty="0"/>
+              <a:t> strict of a separation of model types sometimes. </a:t>
+            </a:r>
+          </a:p>
+          <a:p>
+            <a:pPr lvl="1"/>
+            <a:r>
+              <a:rPr lang="en-US" dirty="0"/>
+              <a:t>You can predict text stuff with CNNs and image stuff with RNNs. </a:t>
+            </a:r>
+          </a:p>
+          <a:p>
+            <a:pPr lvl="1"/>
+            <a:r>
+              <a:rPr lang="en-US" dirty="0"/>
+              <a:t>Layers can also be mix and matched inside models – </a:t>
+            </a:r>
+            <a:r>
+              <a:rPr lang="en-US" dirty="0" err="1"/>
+              <a:t>resnet</a:t>
+            </a:r>
+            <a:r>
+              <a:rPr lang="en-US" dirty="0"/>
+              <a:t> image models have recurrent bits. </a:t>
+            </a:r>
+          </a:p>
+          <a:p>
+            <a:pPr lvl="1"/>
+            <a:endParaRPr lang="en-US" dirty="0"/>
+          </a:p>
+        </p:txBody>
+      </p:sp>
+    </p:spTree>
+    <p:extLst>
+      <p:ext uri="{BB962C8B-B14F-4D97-AF65-F5344CB8AC3E}">
+        <p14:creationId xmlns:p14="http://schemas.microsoft.com/office/powerpoint/2010/main" val="659072108"/>
+      </p:ext>
+    </p:extLst>
+  </p:cSld>
+  <p:clrMapOvr>
+    <a:masterClrMapping/>
+  </p:clrMapOvr>
+</p:sld>
+</file>
+
+<file path=ppt/slides/slide26.xml><?xml version="1.0" encoding="utf-8"?>
+<p:sld xmlns:a="http://schemas.openxmlformats.org/drawingml/2006/main" xmlns:r="http://schemas.openxmlformats.org/officeDocument/2006/relationships" xmlns:p="http://schemas.openxmlformats.org/presentationml/2006/main">
+  <p:cSld>
+    <p:spTree>
+      <p:nvGrpSpPr>
+        <p:cNvPr id="1" name=""/>
+        <p:cNvGrpSpPr/>
+        <p:nvPr/>
+      </p:nvGrpSpPr>
+      <p:grpSpPr>
+        <a:xfrm>
+          <a:off x="0" y="0"/>
+          <a:ext cx="0" cy="0"/>
+          <a:chOff x="0" y="0"/>
+          <a:chExt cx="0" cy="0"/>
+        </a:xfrm>
+      </p:grpSpPr>
+      <p:sp>
+        <p:nvSpPr>
+          <p:cNvPr id="2" name="Title 1">
+            <a:extLst>
+              <a:ext uri="{FF2B5EF4-FFF2-40B4-BE49-F238E27FC236}">
                 <a16:creationId xmlns:a16="http://schemas.microsoft.com/office/drawing/2014/main" id="{5662ED32-A43E-0DDC-141D-D62215D5460E}"/>
               </a:ext>
             </a:extLst>
@@ -6192,12 +6435,45 @@
             <p:ph idx="1"/>
           </p:nvPr>
         </p:nvSpPr>
-        <p:spPr/>
-        <p:txBody>
-          <a:bodyPr/>
-          <a:lstStyle/>
-          <a:p>
-            <a:endParaRPr lang="en-US" dirty="0"/>
+        <p:spPr>
+          <a:xfrm>
+            <a:off x="1451579" y="1853754"/>
+            <a:ext cx="9603275" cy="4199727"/>
+          </a:xfrm>
+        </p:spPr>
+        <p:txBody>
+          <a:bodyPr/>
+          <a:lstStyle/>
+          <a:p>
+            <a:r>
+              <a:rPr lang="en-US" dirty="0"/>
+              <a:t>Classifications with NLP data is pretty simple once we handle the data. </a:t>
+            </a:r>
+          </a:p>
+          <a:p>
+            <a:r>
+              <a:rPr lang="en-US" dirty="0"/>
+              <a:t>Standardize lengths. </a:t>
+            </a:r>
+          </a:p>
+          <a:p>
+            <a:pPr lvl="1"/>
+            <a:r>
+              <a:rPr lang="en-US" dirty="0"/>
+              <a:t>Pad the data, or use packed sequences to save processing time. </a:t>
+            </a:r>
+          </a:p>
+          <a:p>
+            <a:r>
+              <a:rPr lang="en-US" dirty="0"/>
+              <a:t>Generate vector representation with the embedding layer. </a:t>
+            </a:r>
+          </a:p>
+          <a:p>
+            <a:r>
+              <a:rPr lang="en-US" dirty="0"/>
+              <a:t>Create a normal LSTM model to capture text features and feed to dense layers. </a:t>
+            </a:r>
           </a:p>
         </p:txBody>
       </p:sp>

--- a/reference_content/Slides/TORCH_nlp.pptx
+++ b/reference_content/Slides/TORCH_nlp.pptx
@@ -3787,7 +3787,7 @@
           <a:p>
             <a:r>
               <a:rPr lang="en-US" dirty="0"/>
-              <a:t>Today – NLP with RNNs part 1, classification. </a:t>
+              <a:t>Today – NLP with RNNs part 1, classification. (Pull for updates). </a:t>
             </a:r>
           </a:p>
           <a:p>
